--- a/lesson_11-state_management_in_flutter/lesson_11-state_management_in_flutter.pptx
+++ b/lesson_11-state_management_in_flutter/lesson_11-state_management_in_flutter.pptx
@@ -230,7 +230,7 @@
           <a:p>
             <a:fld id="{81C4B3FE-0320-8142-8396-5C3025C019EC}" type="datetimeFigureOut">
               <a:rPr lang="en-IT" smtClean="0"/>
-              <a:t>2/17/26</a:t>
+              <a:t>2/19/26</a:t>
             </a:fld>
             <a:endParaRPr lang="en-IT"/>
           </a:p>
@@ -18286,17 +18286,11 @@
             </a:r>
             <a:r>
               <a:rPr lang="en-GB" dirty="0">
-                <a:latin typeface="Courier" pitchFamily="2" charset="0"/>
-                <a:ea typeface="Palatino" pitchFamily="2" charset="77"/>
-              </a:rPr>
-              <a:t>Consumer’s builder</a:t>
-            </a:r>
-            <a:r>
-              <a:rPr lang="en-GB" dirty="0">
-                <a:latin typeface="Palatino" pitchFamily="2" charset="77"/>
-                <a:ea typeface="Palatino" pitchFamily="2" charset="77"/>
-              </a:rPr>
-              <a:t> </a:t>
+                <a:latin typeface="Menlo" panose="020B0609030804020204" pitchFamily="49" charset="0"/>
+                <a:ea typeface="Menlo" panose="020B0609030804020204" pitchFamily="49" charset="0"/>
+                <a:cs typeface="Menlo" panose="020B0609030804020204" pitchFamily="49" charset="0"/>
+              </a:rPr>
+              <a:t>Consumer’s builder </a:t>
             </a:r>
             <a:r>
               <a:rPr lang="en-GB" dirty="0">
